--- a/deep_learning/3_RNN_NLP/2_NLP_1_pipeline/1_NLP_pipeline.pptx
+++ b/deep_learning/3_RNN_NLP/2_NLP_1_pipeline/1_NLP_pipeline.pptx
@@ -5,10 +5,10 @@
     <p:sldMasterId id="2147483648" r:id="rId1"/>
   </p:sldMasterIdLst>
   <p:notesMasterIdLst>
-    <p:notesMasterId r:id="rId12"/>
+    <p:notesMasterId r:id="rId13"/>
   </p:notesMasterIdLst>
   <p:handoutMasterIdLst>
-    <p:handoutMasterId r:id="rId13"/>
+    <p:handoutMasterId r:id="rId14"/>
   </p:handoutMasterIdLst>
   <p:sldIdLst>
     <p:sldId id="257" r:id="rId2"/>
@@ -21,6 +21,7 @@
     <p:sldId id="283" r:id="rId9"/>
     <p:sldId id="284" r:id="rId10"/>
     <p:sldId id="275" r:id="rId11"/>
+    <p:sldId id="285" r:id="rId12"/>
   </p:sldIdLst>
   <p:sldSz cx="12192000" cy="6858000"/>
   <p:notesSz cx="6858000" cy="9144000"/>
@@ -224,7 +225,7 @@
           <a:p>
             <a:fld id="{7BAEECA8-D063-486F-AE31-5020270C1449}" type="datetimeFigureOut">
               <a:rPr lang="en-US" smtClean="0"/>
-              <a:t>4/19/2026</a:t>
+              <a:t>4/25/2026</a:t>
             </a:fld>
             <a:endParaRPr lang="en-US"/>
           </a:p>
@@ -401,7 +402,7 @@
           <a:p>
             <a:fld id="{CB233BD1-3BA8-448D-9D08-7846095EA517}" type="datetimeFigureOut">
               <a:rPr lang="en-US" smtClean="0"/>
-              <a:t>4/19/2026</a:t>
+              <a:t>4/25/2026</a:t>
             </a:fld>
             <a:endParaRPr lang="en-US"/>
           </a:p>
@@ -815,7 +816,7 @@
           <a:p>
             <a:fld id="{6383FAE1-13DE-4511-8C1B-C8AFB720664C}" type="datetimeFigureOut">
               <a:rPr lang="en-US" smtClean="0"/>
-              <a:t>4/19/2026</a:t>
+              <a:t>4/25/2026</a:t>
             </a:fld>
             <a:endParaRPr lang="en-US"/>
           </a:p>
@@ -1013,7 +1014,7 @@
           <a:p>
             <a:fld id="{6383FAE1-13DE-4511-8C1B-C8AFB720664C}" type="datetimeFigureOut">
               <a:rPr lang="en-US" smtClean="0"/>
-              <a:t>4/19/2026</a:t>
+              <a:t>4/25/2026</a:t>
             </a:fld>
             <a:endParaRPr lang="en-US"/>
           </a:p>
@@ -1221,7 +1222,7 @@
           <a:p>
             <a:fld id="{6383FAE1-13DE-4511-8C1B-C8AFB720664C}" type="datetimeFigureOut">
               <a:rPr lang="en-US" smtClean="0"/>
-              <a:t>4/19/2026</a:t>
+              <a:t>4/25/2026</a:t>
             </a:fld>
             <a:endParaRPr lang="en-US"/>
           </a:p>
@@ -1419,7 +1420,7 @@
           <a:p>
             <a:fld id="{6383FAE1-13DE-4511-8C1B-C8AFB720664C}" type="datetimeFigureOut">
               <a:rPr lang="en-US" smtClean="0"/>
-              <a:t>4/19/2026</a:t>
+              <a:t>4/25/2026</a:t>
             </a:fld>
             <a:endParaRPr lang="en-US"/>
           </a:p>
@@ -1694,7 +1695,7 @@
           <a:p>
             <a:fld id="{6383FAE1-13DE-4511-8C1B-C8AFB720664C}" type="datetimeFigureOut">
               <a:rPr lang="en-US" smtClean="0"/>
-              <a:t>4/19/2026</a:t>
+              <a:t>4/25/2026</a:t>
             </a:fld>
             <a:endParaRPr lang="en-US"/>
           </a:p>
@@ -1959,7 +1960,7 @@
           <a:p>
             <a:fld id="{6383FAE1-13DE-4511-8C1B-C8AFB720664C}" type="datetimeFigureOut">
               <a:rPr lang="en-US" smtClean="0"/>
-              <a:t>4/19/2026</a:t>
+              <a:t>4/25/2026</a:t>
             </a:fld>
             <a:endParaRPr lang="en-US"/>
           </a:p>
@@ -2371,7 +2372,7 @@
           <a:p>
             <a:fld id="{6383FAE1-13DE-4511-8C1B-C8AFB720664C}" type="datetimeFigureOut">
               <a:rPr lang="en-US" smtClean="0"/>
-              <a:t>4/19/2026</a:t>
+              <a:t>4/25/2026</a:t>
             </a:fld>
             <a:endParaRPr lang="en-US"/>
           </a:p>
@@ -2512,7 +2513,7 @@
           <a:p>
             <a:fld id="{6383FAE1-13DE-4511-8C1B-C8AFB720664C}" type="datetimeFigureOut">
               <a:rPr lang="en-US" smtClean="0"/>
-              <a:t>4/19/2026</a:t>
+              <a:t>4/25/2026</a:t>
             </a:fld>
             <a:endParaRPr lang="en-US"/>
           </a:p>
@@ -2625,7 +2626,7 @@
           <a:p>
             <a:fld id="{6383FAE1-13DE-4511-8C1B-C8AFB720664C}" type="datetimeFigureOut">
               <a:rPr lang="en-US" smtClean="0"/>
-              <a:t>4/19/2026</a:t>
+              <a:t>4/25/2026</a:t>
             </a:fld>
             <a:endParaRPr lang="en-US"/>
           </a:p>
@@ -2936,7 +2937,7 @@
           <a:p>
             <a:fld id="{6383FAE1-13DE-4511-8C1B-C8AFB720664C}" type="datetimeFigureOut">
               <a:rPr lang="en-US" smtClean="0"/>
-              <a:t>4/19/2026</a:t>
+              <a:t>4/25/2026</a:t>
             </a:fld>
             <a:endParaRPr lang="en-US"/>
           </a:p>
@@ -3227,7 +3228,7 @@
           <a:p>
             <a:fld id="{6383FAE1-13DE-4511-8C1B-C8AFB720664C}" type="datetimeFigureOut">
               <a:rPr lang="en-US" smtClean="0"/>
-              <a:t>4/19/2026</a:t>
+              <a:t>4/25/2026</a:t>
             </a:fld>
             <a:endParaRPr lang="en-US"/>
           </a:p>
@@ -3471,7 +3472,7 @@
           <a:p>
             <a:fld id="{6383FAE1-13DE-4511-8C1B-C8AFB720664C}" type="datetimeFigureOut">
               <a:rPr lang="en-US" smtClean="0"/>
-              <a:t>4/19/2026</a:t>
+              <a:t>4/25/2026</a:t>
             </a:fld>
             <a:endParaRPr lang="en-US"/>
           </a:p>
@@ -4171,51 +4172,7 @@
                   </a:schemeClr>
                 </a:solidFill>
               </a:rPr>
-              <a:t>The model could </a:t>
-            </a:r>
-            <a:r>
-              <a:rPr lang="en-US" sz="2400">
-                <a:solidFill>
-                  <a:schemeClr val="accent6">
-                    <a:lumMod val="60000"/>
-                    <a:lumOff val="40000"/>
-                  </a:schemeClr>
-                </a:solidFill>
-              </a:rPr>
-              <a:t>be sentence</a:t>
-            </a:r>
-            <a:r>
-              <a:rPr lang="en-US" sz="2400" dirty="0">
-                <a:solidFill>
-                  <a:schemeClr val="accent6">
-                    <a:lumMod val="60000"/>
-                    <a:lumOff val="40000"/>
-                  </a:schemeClr>
-                </a:solidFill>
-              </a:rPr>
-              <a:t>-</a:t>
-            </a:r>
-            <a:r>
-              <a:rPr lang="en-US" sz="2400">
-                <a:solidFill>
-                  <a:schemeClr val="accent6">
-                    <a:lumMod val="60000"/>
-                    <a:lumOff val="40000"/>
-                  </a:schemeClr>
-                </a:solidFill>
-              </a:rPr>
-              <a:t>completion</a:t>
-            </a:r>
-            <a:r>
-              <a:rPr lang="en-US" sz="2400" dirty="0">
-                <a:solidFill>
-                  <a:schemeClr val="accent6">
-                    <a:lumMod val="60000"/>
-                    <a:lumOff val="40000"/>
-                  </a:schemeClr>
-                </a:solidFill>
-              </a:rPr>
-              <a:t>, etc.</a:t>
+              <a:t>The model could be sentence-completion, sentiment analysis, etc.</a:t>
             </a:r>
           </a:p>
         </p:txBody>
@@ -4258,10 +4215,315 @@
       </p:grpSpPr>
       <p:sp>
         <p:nvSpPr>
+          <p:cNvPr id="6" name="TextBox 5">
+            <a:extLst>
+              <a:ext uri="{FF2B5EF4-FFF2-40B4-BE49-F238E27FC236}">
+                <a16:creationId xmlns:a16="http://schemas.microsoft.com/office/drawing/2014/main" id="{11017D61-8B5D-E6CD-D142-357628E5ADB2}"/>
+              </a:ext>
+            </a:extLst>
+          </p:cNvPr>
+          <p:cNvSpPr txBox="1"/>
+          <p:nvPr/>
+        </p:nvSpPr>
+        <p:spPr>
+          <a:xfrm>
+            <a:off x="196596" y="335203"/>
+            <a:ext cx="11516868" cy="5262979"/>
+          </a:xfrm>
+          <a:prstGeom prst="rect">
+            <a:avLst/>
+          </a:prstGeom>
+          <a:noFill/>
+        </p:spPr>
+        <p:txBody>
+          <a:bodyPr wrap="square">
+            <a:spAutoFit/>
+          </a:bodyPr>
+          <a:lstStyle/>
+          <a:p>
+            <a:pPr>
+              <a:buNone/>
+            </a:pPr>
+            <a:r>
+              <a:rPr lang="en-US" sz="2400" b="1" dirty="0">
+                <a:solidFill>
+                  <a:schemeClr val="accent6">
+                    <a:lumMod val="60000"/>
+                    <a:lumOff val="40000"/>
+                  </a:schemeClr>
+                </a:solidFill>
+              </a:rPr>
+              <a:t>Why embedding ? </a:t>
+            </a:r>
+          </a:p>
+          <a:p>
+            <a:pPr>
+              <a:buNone/>
+            </a:pPr>
+            <a:r>
+              <a:rPr lang="en-US" sz="2400" b="1" dirty="0">
+                <a:solidFill>
+                  <a:schemeClr val="accent6">
+                    <a:lumMod val="60000"/>
+                    <a:lumOff val="40000"/>
+                  </a:schemeClr>
+                </a:solidFill>
+              </a:rPr>
+              <a:t>1. Captures semantic meaning:  </a:t>
+            </a:r>
+            <a:r>
+              <a:rPr lang="en-US" sz="2400" dirty="0">
+                <a:solidFill>
+                  <a:schemeClr val="accent6">
+                    <a:lumMod val="60000"/>
+                    <a:lumOff val="40000"/>
+                  </a:schemeClr>
+                </a:solidFill>
+              </a:rPr>
+              <a:t>Embeddings place similar words </a:t>
+            </a:r>
+            <a:r>
+              <a:rPr lang="en-US" sz="2400" b="1" dirty="0">
+                <a:solidFill>
+                  <a:schemeClr val="accent6">
+                    <a:lumMod val="60000"/>
+                    <a:lumOff val="40000"/>
+                  </a:schemeClr>
+                </a:solidFill>
+              </a:rPr>
+              <a:t>closer in vector space</a:t>
+            </a:r>
+            <a:r>
+              <a:rPr lang="en-US" sz="2400" dirty="0">
+                <a:solidFill>
+                  <a:schemeClr val="accent6">
+                    <a:lumMod val="60000"/>
+                    <a:lumOff val="40000"/>
+                  </a:schemeClr>
+                </a:solidFill>
+              </a:rPr>
+              <a:t>.</a:t>
+            </a:r>
+          </a:p>
+          <a:p>
+            <a:pPr>
+              <a:buNone/>
+            </a:pPr>
+            <a:r>
+              <a:rPr lang="en-US" sz="2400" dirty="0">
+                <a:solidFill>
+                  <a:schemeClr val="accent6">
+                    <a:lumMod val="60000"/>
+                    <a:lumOff val="40000"/>
+                  </a:schemeClr>
+                </a:solidFill>
+              </a:rPr>
+              <a:t>king ≈ queen                    </a:t>
+            </a:r>
+          </a:p>
+          <a:p>
+            <a:pPr>
+              <a:buNone/>
+            </a:pPr>
+            <a:r>
+              <a:rPr lang="en-US" sz="2400" dirty="0">
+                <a:solidFill>
+                  <a:schemeClr val="accent6">
+                    <a:lumMod val="60000"/>
+                    <a:lumOff val="40000"/>
+                  </a:schemeClr>
+                </a:solidFill>
+              </a:rPr>
+              <a:t>apple ≠ king</a:t>
+            </a:r>
+          </a:p>
+          <a:p>
+            <a:pPr>
+              <a:buNone/>
+            </a:pPr>
+            <a:endParaRPr lang="en-US" sz="2400" dirty="0">
+              <a:solidFill>
+                <a:schemeClr val="accent6">
+                  <a:lumMod val="60000"/>
+                  <a:lumOff val="40000"/>
+                </a:schemeClr>
+              </a:solidFill>
+            </a:endParaRPr>
+          </a:p>
+          <a:p>
+            <a:r>
+              <a:rPr lang="en-US" sz="2400" b="1" dirty="0">
+                <a:solidFill>
+                  <a:schemeClr val="accent6">
+                    <a:lumMod val="60000"/>
+                    <a:lumOff val="40000"/>
+                  </a:schemeClr>
+                </a:solidFill>
+              </a:rPr>
+              <a:t>2. Fix sparsity problem (better than one-hot encoding)</a:t>
+            </a:r>
+          </a:p>
+          <a:p>
+            <a:r>
+              <a:rPr lang="en-US" sz="2400" dirty="0">
+                <a:solidFill>
+                  <a:schemeClr val="accent6">
+                    <a:lumMod val="60000"/>
+                    <a:lumOff val="40000"/>
+                  </a:schemeClr>
+                </a:solidFill>
+              </a:rPr>
+              <a:t>Without embeddings:</a:t>
+            </a:r>
+          </a:p>
+          <a:p>
+            <a:pPr marL="342900" indent="-342900">
+              <a:buFont typeface="Arial" panose="020B0604020202020204" pitchFamily="34" charset="0"/>
+              <a:buChar char="•"/>
+            </a:pPr>
+            <a:r>
+              <a:rPr lang="en-US" sz="2400" dirty="0">
+                <a:solidFill>
+                  <a:schemeClr val="accent6">
+                    <a:lumMod val="60000"/>
+                    <a:lumOff val="40000"/>
+                  </a:schemeClr>
+                </a:solidFill>
+              </a:rPr>
+              <a:t>Vocabulary size = 10,000 </a:t>
+            </a:r>
+          </a:p>
+          <a:p>
+            <a:pPr marL="342900" indent="-342900">
+              <a:buFont typeface="Arial" panose="020B0604020202020204" pitchFamily="34" charset="0"/>
+              <a:buChar char="•"/>
+            </a:pPr>
+            <a:r>
+              <a:rPr lang="en-US" sz="2400" dirty="0">
+                <a:solidFill>
+                  <a:schemeClr val="accent6">
+                    <a:lumMod val="60000"/>
+                    <a:lumOff val="40000"/>
+                  </a:schemeClr>
+                </a:solidFill>
+              </a:rPr>
+              <a:t>One-hot vector = 10,000 dimensions (mostly zeros ❌) </a:t>
+            </a:r>
+          </a:p>
+          <a:p>
+            <a:endParaRPr lang="en-US" sz="2400" dirty="0">
+              <a:solidFill>
+                <a:schemeClr val="accent6">
+                  <a:lumMod val="60000"/>
+                  <a:lumOff val="40000"/>
+                </a:schemeClr>
+              </a:solidFill>
+            </a:endParaRPr>
+          </a:p>
+          <a:p>
+            <a:r>
+              <a:rPr lang="en-US" sz="2400" dirty="0">
+                <a:solidFill>
+                  <a:schemeClr val="accent6">
+                    <a:lumMod val="60000"/>
+                    <a:lumOff val="40000"/>
+                  </a:schemeClr>
+                </a:solidFill>
+              </a:rPr>
+              <a:t>With embeddings:</a:t>
+            </a:r>
+          </a:p>
+          <a:p>
+            <a:r>
+              <a:rPr lang="en-US" sz="2400" dirty="0">
+                <a:solidFill>
+                  <a:schemeClr val="accent6">
+                    <a:lumMod val="60000"/>
+                    <a:lumOff val="40000"/>
+                  </a:schemeClr>
+                </a:solidFill>
+              </a:rPr>
+              <a:t>Dense vector (e.g., 100 dimensions) ✅</a:t>
+            </a:r>
+            <a:br>
+              <a:rPr lang="en-US" sz="2400" dirty="0">
+                <a:solidFill>
+                  <a:schemeClr val="accent6">
+                    <a:lumMod val="60000"/>
+                    <a:lumOff val="40000"/>
+                  </a:schemeClr>
+                </a:solidFill>
+              </a:rPr>
+            </a:br>
+            <a:r>
+              <a:rPr lang="en-US" sz="2400" dirty="0">
+                <a:solidFill>
+                  <a:schemeClr val="accent6">
+                    <a:lumMod val="60000"/>
+                    <a:lumOff val="40000"/>
+                  </a:schemeClr>
+                </a:solidFill>
+              </a:rPr>
+              <a:t>👉 More efficient + meaningful</a:t>
+            </a:r>
+          </a:p>
+          <a:p>
+            <a:pPr>
+              <a:buNone/>
+            </a:pPr>
+            <a:endParaRPr lang="en-US" sz="2400" dirty="0">
+              <a:solidFill>
+                <a:schemeClr val="accent6">
+                  <a:lumMod val="60000"/>
+                  <a:lumOff val="40000"/>
+                </a:schemeClr>
+              </a:solidFill>
+            </a:endParaRPr>
+          </a:p>
+        </p:txBody>
+      </p:sp>
+    </p:spTree>
+    <p:extLst>
+      <p:ext uri="{BB962C8B-B14F-4D97-AF65-F5344CB8AC3E}">
+        <p14:creationId xmlns:p14="http://schemas.microsoft.com/office/powerpoint/2010/main" val="366625378"/>
+      </p:ext>
+    </p:extLst>
+  </p:cSld>
+  <p:clrMapOvr>
+    <a:masterClrMapping/>
+  </p:clrMapOvr>
+</p:sld>
+</file>
+
+<file path=ppt/slides/slide11.xml><?xml version="1.0" encoding="utf-8"?>
+<p:sld xmlns:a="http://schemas.openxmlformats.org/drawingml/2006/main" xmlns:r="http://schemas.openxmlformats.org/officeDocument/2006/relationships" xmlns:p="http://schemas.openxmlformats.org/presentationml/2006/main">
+  <p:cSld>
+    <p:spTree>
+      <p:nvGrpSpPr>
+        <p:cNvPr id="1" name="">
+          <a:extLst>
+            <a:ext uri="{FF2B5EF4-FFF2-40B4-BE49-F238E27FC236}">
+              <a16:creationId xmlns:a16="http://schemas.microsoft.com/office/drawing/2014/main" id="{A635DBB4-1D41-0EAB-BAE7-616F025E4862}"/>
+            </a:ext>
+          </a:extLst>
+        </p:cNvPr>
+        <p:cNvGrpSpPr/>
+        <p:nvPr/>
+      </p:nvGrpSpPr>
+      <p:grpSpPr>
+        <a:xfrm>
+          <a:off x="0" y="0"/>
+          <a:ext cx="0" cy="0"/>
+          <a:chOff x="0" y="0"/>
+          <a:chExt cx="0" cy="0"/>
+        </a:xfrm>
+      </p:grpSpPr>
+      <p:sp>
+        <p:nvSpPr>
           <p:cNvPr id="2" name="Title 1">
             <a:extLst>
               <a:ext uri="{FF2B5EF4-FFF2-40B4-BE49-F238E27FC236}">
-                <a16:creationId xmlns:a16="http://schemas.microsoft.com/office/drawing/2014/main" id="{795E1B75-886E-0812-B2FD-DD250C225521}"/>
+                <a16:creationId xmlns:a16="http://schemas.microsoft.com/office/drawing/2014/main" id="{94FDDE46-5FE9-CCC1-DA8D-04B92FE177DF}"/>
               </a:ext>
             </a:extLst>
           </p:cNvPr>
@@ -4296,7 +4558,7 @@
           <p:cNvPr id="4" name="TextBox 3">
             <a:extLst>
               <a:ext uri="{FF2B5EF4-FFF2-40B4-BE49-F238E27FC236}">
-                <a16:creationId xmlns:a16="http://schemas.microsoft.com/office/drawing/2014/main" id="{902F8BE4-9CEA-0DAD-0357-E0A8215F169D}"/>
+                <a16:creationId xmlns:a16="http://schemas.microsoft.com/office/drawing/2014/main" id="{73B29DD8-5515-3BCE-43BC-064288F84D72}"/>
               </a:ext>
             </a:extLst>
           </p:cNvPr>
@@ -4371,7 +4633,7 @@
     </p:spTree>
     <p:extLst>
       <p:ext uri="{BB962C8B-B14F-4D97-AF65-F5344CB8AC3E}">
-        <p14:creationId xmlns:p14="http://schemas.microsoft.com/office/powerpoint/2010/main" val="366625378"/>
+        <p14:creationId xmlns:p14="http://schemas.microsoft.com/office/powerpoint/2010/main" val="1645508196"/>
       </p:ext>
     </p:extLst>
   </p:cSld>
@@ -5097,10 +5359,10 @@
       </p:grpSpPr>
       <p:pic>
         <p:nvPicPr>
-          <p:cNvPr id="4" name="Picture 3">
-            <a:extLst>
-              <a:ext uri="{FF2B5EF4-FFF2-40B4-BE49-F238E27FC236}">
-                <a16:creationId xmlns:a16="http://schemas.microsoft.com/office/drawing/2014/main" id="{2560AC57-9294-F5B6-610D-2B4FE3A502BE}"/>
+          <p:cNvPr id="6" name="Picture 5">
+            <a:extLst>
+              <a:ext uri="{FF2B5EF4-FFF2-40B4-BE49-F238E27FC236}">
+                <a16:creationId xmlns:a16="http://schemas.microsoft.com/office/drawing/2014/main" id="{C96143B5-EC6A-7292-B5E1-D94303D002A1}"/>
               </a:ext>
             </a:extLst>
           </p:cNvPr>
@@ -5111,36 +5373,6 @@
         </p:nvPicPr>
         <p:blipFill>
           <a:blip r:embed="rId2"/>
-          <a:stretch>
-            <a:fillRect/>
-          </a:stretch>
-        </p:blipFill>
-        <p:spPr>
-          <a:xfrm>
-            <a:off x="816661" y="195560"/>
-            <a:ext cx="8364117" cy="3924848"/>
-          </a:xfrm>
-          <a:prstGeom prst="rect">
-            <a:avLst/>
-          </a:prstGeom>
-        </p:spPr>
-      </p:pic>
-      <p:pic>
-        <p:nvPicPr>
-          <p:cNvPr id="6" name="Picture 5">
-            <a:extLst>
-              <a:ext uri="{FF2B5EF4-FFF2-40B4-BE49-F238E27FC236}">
-                <a16:creationId xmlns:a16="http://schemas.microsoft.com/office/drawing/2014/main" id="{C96143B5-EC6A-7292-B5E1-D94303D002A1}"/>
-              </a:ext>
-            </a:extLst>
-          </p:cNvPr>
-          <p:cNvPicPr>
-            <a:picLocks noChangeAspect="1"/>
-          </p:cNvPicPr>
-          <p:nvPr/>
-        </p:nvPicPr>
-        <p:blipFill>
-          <a:blip r:embed="rId3"/>
           <a:stretch>
             <a:fillRect/>
           </a:stretch>
@@ -5210,6 +5442,36 @@
           </a:p>
         </p:txBody>
       </p:sp>
+      <p:pic>
+        <p:nvPicPr>
+          <p:cNvPr id="3" name="Picture 2">
+            <a:extLst>
+              <a:ext uri="{FF2B5EF4-FFF2-40B4-BE49-F238E27FC236}">
+                <a16:creationId xmlns:a16="http://schemas.microsoft.com/office/drawing/2014/main" id="{AEEF9953-3A08-54AD-13BF-6E7827A7995D}"/>
+              </a:ext>
+            </a:extLst>
+          </p:cNvPr>
+          <p:cNvPicPr>
+            <a:picLocks noChangeAspect="1"/>
+          </p:cNvPicPr>
+          <p:nvPr/>
+        </p:nvPicPr>
+        <p:blipFill>
+          <a:blip r:embed="rId3"/>
+          <a:stretch>
+            <a:fillRect/>
+          </a:stretch>
+        </p:blipFill>
+        <p:spPr>
+          <a:xfrm>
+            <a:off x="67222" y="64008"/>
+            <a:ext cx="8768107" cy="4161715"/>
+          </a:xfrm>
+          <a:prstGeom prst="rect">
+            <a:avLst/>
+          </a:prstGeom>
+        </p:spPr>
+      </p:pic>
     </p:spTree>
     <p:extLst>
       <p:ext uri="{BB962C8B-B14F-4D97-AF65-F5344CB8AC3E}">
@@ -5451,7 +5713,7 @@
                 </a:solidFill>
                 <a:latin typeface="Courier New" panose="02070309020205020404" pitchFamily="49" charset="0"/>
               </a:rPr>
-              <a:t>3 → [0.2, -0.1, 0.9]</a:t>
+              <a:t>3 → [0.2, -0.1, 0.9, -0.2, 0.003]</a:t>
             </a:r>
           </a:p>
         </p:txBody>
@@ -5494,10 +5756,10 @@
       </p:grpSpPr>
       <p:pic>
         <p:nvPicPr>
-          <p:cNvPr id="4" name="Picture 3">
-            <a:extLst>
-              <a:ext uri="{FF2B5EF4-FFF2-40B4-BE49-F238E27FC236}">
-                <a16:creationId xmlns:a16="http://schemas.microsoft.com/office/drawing/2014/main" id="{21176DBC-9FE6-E2DC-F99F-D450DE56E068}"/>
+          <p:cNvPr id="6" name="Picture 5">
+            <a:extLst>
+              <a:ext uri="{FF2B5EF4-FFF2-40B4-BE49-F238E27FC236}">
+                <a16:creationId xmlns:a16="http://schemas.microsoft.com/office/drawing/2014/main" id="{3A30F1FA-AA6A-74DA-B236-09D5BFD34C10}"/>
               </a:ext>
             </a:extLst>
           </p:cNvPr>
@@ -5514,8 +5776,68 @@
         </p:blipFill>
         <p:spPr>
           <a:xfrm>
-            <a:off x="1677817" y="521208"/>
-            <a:ext cx="6730326" cy="2654213"/>
+            <a:off x="64008" y="3495400"/>
+            <a:ext cx="6706536" cy="371527"/>
+          </a:xfrm>
+          <a:prstGeom prst="rect">
+            <a:avLst/>
+          </a:prstGeom>
+        </p:spPr>
+      </p:pic>
+      <p:pic>
+        <p:nvPicPr>
+          <p:cNvPr id="8" name="Picture 7">
+            <a:extLst>
+              <a:ext uri="{FF2B5EF4-FFF2-40B4-BE49-F238E27FC236}">
+                <a16:creationId xmlns:a16="http://schemas.microsoft.com/office/drawing/2014/main" id="{3CEA4326-61EA-B19D-A0BD-1AF5A7BCED20}"/>
+              </a:ext>
+            </a:extLst>
+          </p:cNvPr>
+          <p:cNvPicPr>
+            <a:picLocks noChangeAspect="1"/>
+          </p:cNvPicPr>
+          <p:nvPr/>
+        </p:nvPicPr>
+        <p:blipFill>
+          <a:blip r:embed="rId3"/>
+          <a:stretch>
+            <a:fillRect/>
+          </a:stretch>
+        </p:blipFill>
+        <p:spPr>
+          <a:xfrm>
+            <a:off x="64008" y="3916023"/>
+            <a:ext cx="8097022" cy="2840898"/>
+          </a:xfrm>
+          <a:prstGeom prst="rect">
+            <a:avLst/>
+          </a:prstGeom>
+        </p:spPr>
+      </p:pic>
+      <p:pic>
+        <p:nvPicPr>
+          <p:cNvPr id="10" name="Picture 9">
+            <a:extLst>
+              <a:ext uri="{FF2B5EF4-FFF2-40B4-BE49-F238E27FC236}">
+                <a16:creationId xmlns:a16="http://schemas.microsoft.com/office/drawing/2014/main" id="{AD05D794-CD23-7B9F-3A49-9E8B9272F6D4}"/>
+              </a:ext>
+            </a:extLst>
+          </p:cNvPr>
+          <p:cNvPicPr>
+            <a:picLocks noChangeAspect="1"/>
+          </p:cNvPicPr>
+          <p:nvPr/>
+        </p:nvPicPr>
+        <p:blipFill>
+          <a:blip r:embed="rId4"/>
+          <a:stretch>
+            <a:fillRect/>
+          </a:stretch>
+        </p:blipFill>
+        <p:spPr>
+          <a:xfrm>
+            <a:off x="0" y="0"/>
+            <a:ext cx="9347124" cy="3429000"/>
           </a:xfrm>
           <a:prstGeom prst="rect">
             <a:avLst/>

--- a/deep_learning/3_RNN_NLP/2_NLP_1_pipeline/1_NLP_pipeline.pptx
+++ b/deep_learning/3_RNN_NLP/2_NLP_1_pipeline/1_NLP_pipeline.pptx
@@ -225,7 +225,7 @@
           <a:p>
             <a:fld id="{7BAEECA8-D063-486F-AE31-5020270C1449}" type="datetimeFigureOut">
               <a:rPr lang="en-US" smtClean="0"/>
-              <a:t>4/25/2026</a:t>
+              <a:t>7/19/2026</a:t>
             </a:fld>
             <a:endParaRPr lang="en-US"/>
           </a:p>
@@ -402,7 +402,7 @@
           <a:p>
             <a:fld id="{CB233BD1-3BA8-448D-9D08-7846095EA517}" type="datetimeFigureOut">
               <a:rPr lang="en-US" smtClean="0"/>
-              <a:t>4/25/2026</a:t>
+              <a:t>7/19/2026</a:t>
             </a:fld>
             <a:endParaRPr lang="en-US"/>
           </a:p>
@@ -816,7 +816,7 @@
           <a:p>
             <a:fld id="{6383FAE1-13DE-4511-8C1B-C8AFB720664C}" type="datetimeFigureOut">
               <a:rPr lang="en-US" smtClean="0"/>
-              <a:t>4/25/2026</a:t>
+              <a:t>7/19/2026</a:t>
             </a:fld>
             <a:endParaRPr lang="en-US"/>
           </a:p>
@@ -1014,7 +1014,7 @@
           <a:p>
             <a:fld id="{6383FAE1-13DE-4511-8C1B-C8AFB720664C}" type="datetimeFigureOut">
               <a:rPr lang="en-US" smtClean="0"/>
-              <a:t>4/25/2026</a:t>
+              <a:t>7/19/2026</a:t>
             </a:fld>
             <a:endParaRPr lang="en-US"/>
           </a:p>
@@ -1222,7 +1222,7 @@
           <a:p>
             <a:fld id="{6383FAE1-13DE-4511-8C1B-C8AFB720664C}" type="datetimeFigureOut">
               <a:rPr lang="en-US" smtClean="0"/>
-              <a:t>4/25/2026</a:t>
+              <a:t>7/19/2026</a:t>
             </a:fld>
             <a:endParaRPr lang="en-US"/>
           </a:p>
@@ -1420,7 +1420,7 @@
           <a:p>
             <a:fld id="{6383FAE1-13DE-4511-8C1B-C8AFB720664C}" type="datetimeFigureOut">
               <a:rPr lang="en-US" smtClean="0"/>
-              <a:t>4/25/2026</a:t>
+              <a:t>7/19/2026</a:t>
             </a:fld>
             <a:endParaRPr lang="en-US"/>
           </a:p>
@@ -1695,7 +1695,7 @@
           <a:p>
             <a:fld id="{6383FAE1-13DE-4511-8C1B-C8AFB720664C}" type="datetimeFigureOut">
               <a:rPr lang="en-US" smtClean="0"/>
-              <a:t>4/25/2026</a:t>
+              <a:t>7/19/2026</a:t>
             </a:fld>
             <a:endParaRPr lang="en-US"/>
           </a:p>
@@ -1960,7 +1960,7 @@
           <a:p>
             <a:fld id="{6383FAE1-13DE-4511-8C1B-C8AFB720664C}" type="datetimeFigureOut">
               <a:rPr lang="en-US" smtClean="0"/>
-              <a:t>4/25/2026</a:t>
+              <a:t>7/19/2026</a:t>
             </a:fld>
             <a:endParaRPr lang="en-US"/>
           </a:p>
@@ -2372,7 +2372,7 @@
           <a:p>
             <a:fld id="{6383FAE1-13DE-4511-8C1B-C8AFB720664C}" type="datetimeFigureOut">
               <a:rPr lang="en-US" smtClean="0"/>
-              <a:t>4/25/2026</a:t>
+              <a:t>7/19/2026</a:t>
             </a:fld>
             <a:endParaRPr lang="en-US"/>
           </a:p>
@@ -2513,7 +2513,7 @@
           <a:p>
             <a:fld id="{6383FAE1-13DE-4511-8C1B-C8AFB720664C}" type="datetimeFigureOut">
               <a:rPr lang="en-US" smtClean="0"/>
-              <a:t>4/25/2026</a:t>
+              <a:t>7/19/2026</a:t>
             </a:fld>
             <a:endParaRPr lang="en-US"/>
           </a:p>
@@ -2626,7 +2626,7 @@
           <a:p>
             <a:fld id="{6383FAE1-13DE-4511-8C1B-C8AFB720664C}" type="datetimeFigureOut">
               <a:rPr lang="en-US" smtClean="0"/>
-              <a:t>4/25/2026</a:t>
+              <a:t>7/19/2026</a:t>
             </a:fld>
             <a:endParaRPr lang="en-US"/>
           </a:p>
@@ -2937,7 +2937,7 @@
           <a:p>
             <a:fld id="{6383FAE1-13DE-4511-8C1B-C8AFB720664C}" type="datetimeFigureOut">
               <a:rPr lang="en-US" smtClean="0"/>
-              <a:t>4/25/2026</a:t>
+              <a:t>7/19/2026</a:t>
             </a:fld>
             <a:endParaRPr lang="en-US"/>
           </a:p>
@@ -3228,7 +3228,7 @@
           <a:p>
             <a:fld id="{6383FAE1-13DE-4511-8C1B-C8AFB720664C}" type="datetimeFigureOut">
               <a:rPr lang="en-US" smtClean="0"/>
-              <a:t>4/25/2026</a:t>
+              <a:t>7/19/2026</a:t>
             </a:fld>
             <a:endParaRPr lang="en-US"/>
           </a:p>
@@ -3472,7 +3472,7 @@
           <a:p>
             <a:fld id="{6383FAE1-13DE-4511-8C1B-C8AFB720664C}" type="datetimeFigureOut">
               <a:rPr lang="en-US" smtClean="0"/>
-              <a:t>4/25/2026</a:t>
+              <a:t>7/19/2026</a:t>
             </a:fld>
             <a:endParaRPr lang="en-US"/>
           </a:p>
@@ -4045,7 +4045,7 @@
         </p:nvSpPr>
         <p:spPr>
           <a:xfrm>
-            <a:off x="383458" y="36855"/>
+            <a:off x="72562" y="1124991"/>
             <a:ext cx="11348294" cy="3416320"/>
           </a:xfrm>
           <a:prstGeom prst="rect">
@@ -4227,7 +4227,7 @@
         </p:nvSpPr>
         <p:spPr>
           <a:xfrm>
-            <a:off x="196596" y="335203"/>
+            <a:off x="123444" y="1176451"/>
             <a:ext cx="11516868" cy="5262979"/>
           </a:xfrm>
           <a:prstGeom prst="rect">
@@ -4518,118 +4518,6 @@
           <a:chExt cx="0" cy="0"/>
         </a:xfrm>
       </p:grpSpPr>
-      <p:sp>
-        <p:nvSpPr>
-          <p:cNvPr id="2" name="Title 1">
-            <a:extLst>
-              <a:ext uri="{FF2B5EF4-FFF2-40B4-BE49-F238E27FC236}">
-                <a16:creationId xmlns:a16="http://schemas.microsoft.com/office/drawing/2014/main" id="{94FDDE46-5FE9-CCC1-DA8D-04B92FE177DF}"/>
-              </a:ext>
-            </a:extLst>
-          </p:cNvPr>
-          <p:cNvSpPr>
-            <a:spLocks noGrp="1"/>
-          </p:cNvSpPr>
-          <p:nvPr>
-            <p:ph type="title"/>
-          </p:nvPr>
-        </p:nvSpPr>
-        <p:spPr>
-          <a:xfrm>
-            <a:off x="274320" y="136525"/>
-            <a:ext cx="11466576" cy="832739"/>
-          </a:xfrm>
-        </p:spPr>
-        <p:txBody>
-          <a:bodyPr>
-            <a:normAutofit/>
-          </a:bodyPr>
-          <a:lstStyle/>
-          <a:p>
-            <a:r>
-              <a:rPr lang="en-US" sz="3600" dirty="0"/>
-              <a:t>EXTRA</a:t>
-            </a:r>
-          </a:p>
-        </p:txBody>
-      </p:sp>
-      <p:sp>
-        <p:nvSpPr>
-          <p:cNvPr id="4" name="TextBox 3">
-            <a:extLst>
-              <a:ext uri="{FF2B5EF4-FFF2-40B4-BE49-F238E27FC236}">
-                <a16:creationId xmlns:a16="http://schemas.microsoft.com/office/drawing/2014/main" id="{73B29DD8-5515-3BCE-43BC-064288F84D72}"/>
-              </a:ext>
-            </a:extLst>
-          </p:cNvPr>
-          <p:cNvSpPr txBox="1"/>
-          <p:nvPr/>
-        </p:nvSpPr>
-        <p:spPr>
-          <a:xfrm>
-            <a:off x="274320" y="933117"/>
-            <a:ext cx="11658600" cy="646331"/>
-          </a:xfrm>
-          <a:prstGeom prst="rect">
-            <a:avLst/>
-          </a:prstGeom>
-          <a:noFill/>
-        </p:spPr>
-        <p:txBody>
-          <a:bodyPr wrap="square">
-            <a:spAutoFit/>
-          </a:bodyPr>
-          <a:lstStyle/>
-          <a:p>
-            <a:pPr marL="0" indent="0">
-              <a:buNone/>
-            </a:pPr>
-            <a:r>
-              <a:rPr lang="en-US" dirty="0" err="1">
-                <a:solidFill>
-                  <a:schemeClr val="accent6">
-                    <a:lumMod val="60000"/>
-                    <a:lumOff val="40000"/>
-                  </a:schemeClr>
-                </a:solidFill>
-              </a:rPr>
-              <a:t>Xxxxxxxxxxx</a:t>
-            </a:r>
-            <a:endParaRPr lang="en-US" dirty="0">
-              <a:solidFill>
-                <a:schemeClr val="accent6">
-                  <a:lumMod val="60000"/>
-                  <a:lumOff val="40000"/>
-                </a:schemeClr>
-              </a:solidFill>
-            </a:endParaRPr>
-          </a:p>
-          <a:p>
-            <a:pPr marL="0" indent="0">
-              <a:buNone/>
-            </a:pPr>
-            <a:r>
-              <a:rPr lang="en-US" dirty="0" err="1">
-                <a:solidFill>
-                  <a:schemeClr val="accent6">
-                    <a:lumMod val="60000"/>
-                    <a:lumOff val="40000"/>
-                  </a:schemeClr>
-                </a:solidFill>
-              </a:rPr>
-              <a:t>xxxxxxxxxxxx</a:t>
-            </a:r>
-            <a:endParaRPr lang="en-US" dirty="0">
-              <a:solidFill>
-                <a:schemeClr val="accent6">
-                  <a:lumMod val="60000"/>
-                  <a:lumOff val="40000"/>
-                </a:schemeClr>
-              </a:solidFill>
-            </a:endParaRPr>
-          </a:p>
-        </p:txBody>
-      </p:sp>
     </p:spTree>
     <p:extLst>
       <p:ext uri="{BB962C8B-B14F-4D97-AF65-F5344CB8AC3E}">
@@ -4680,7 +4568,7 @@
         </p:nvSpPr>
         <p:spPr>
           <a:xfrm>
-            <a:off x="383458" y="36855"/>
+            <a:off x="154858" y="1271295"/>
             <a:ext cx="11348294" cy="2677656"/>
           </a:xfrm>
           <a:prstGeom prst="rect">
@@ -4978,7 +4866,7 @@
         </p:nvSpPr>
         <p:spPr>
           <a:xfrm>
-            <a:off x="201168" y="154770"/>
+            <a:off x="237744" y="1352634"/>
             <a:ext cx="9884664" cy="2308324"/>
           </a:xfrm>
           <a:prstGeom prst="rect">
@@ -5200,7 +5088,7 @@
         </p:nvSpPr>
         <p:spPr>
           <a:xfrm>
-            <a:off x="246888" y="229261"/>
+            <a:off x="246888" y="1253389"/>
             <a:ext cx="10762488" cy="2677656"/>
           </a:xfrm>
           <a:prstGeom prst="rect">
@@ -5522,7 +5410,7 @@
         </p:nvSpPr>
         <p:spPr>
           <a:xfrm>
-            <a:off x="402336" y="154770"/>
+            <a:off x="320040" y="1590378"/>
             <a:ext cx="8801100" cy="3416320"/>
           </a:xfrm>
           <a:prstGeom prst="rect">
@@ -5577,7 +5465,7 @@
                   </a:schemeClr>
                 </a:solidFill>
               </a:rPr>
-              <a:t>👉 Problem:</a:t>
+              <a:t>Problem:</a:t>
             </a:r>
           </a:p>
           <a:p>
@@ -5664,7 +5552,7 @@
                   </a:schemeClr>
                 </a:solidFill>
               </a:rPr>
-              <a:t>👉 Solution:</a:t>
+              <a:t>Solution:</a:t>
             </a:r>
           </a:p>
           <a:p>
